--- a/example/ex1/PptxIndexerExample1_source.pptx
+++ b/example/ex1/PptxIndexerExample1_source.pptx
@@ -5,7 +5,7 @@
     <p:sldMasterId id="2147483660" r:id="rId1"/>
   </p:sldMasterIdLst>
   <p:notesMasterIdLst>
-    <p:notesMasterId r:id="rId14"/>
+    <p:notesMasterId r:id="rId15"/>
   </p:notesMasterIdLst>
   <p:sldIdLst>
     <p:sldId id="1682" r:id="rId2"/>
@@ -19,7 +19,8 @@
     <p:sldId id="1694" r:id="rId10"/>
     <p:sldId id="1686" r:id="rId11"/>
     <p:sldId id="1697" r:id="rId12"/>
-    <p:sldId id="1696" r:id="rId13"/>
+    <p:sldId id="1698" r:id="rId13"/>
+    <p:sldId id="1696" r:id="rId14"/>
   </p:sldIdLst>
   <p:sldSz cx="12192000" cy="6858000"/>
   <p:notesSz cx="6797675" cy="9926638"/>
@@ -254,7 +255,7 @@
             <a:fld id="{294670BC-B8C6-44A7-84E1-23632D8FD86F}" type="datetimeFigureOut">
               <a:rPr lang="ja-JP" altLang="en-US" smtClean="0"/>
               <a:pPr/>
-              <a:t>2025/2/22</a:t>
+              <a:t>2025/3/6</a:t>
             </a:fld>
             <a:endParaRPr lang="ja-JP" altLang="en-US"/>
           </a:p>
@@ -4207,6 +4208,221 @@
               <a:rPr lang="ja-JP" altLang="en-US" smtClean="0"/>
               <a:pPr/>
               <a:t>11</a:t>
+            </a:fld>
+            <a:endParaRPr lang="ja-JP" altLang="en-US"/>
+          </a:p>
+        </p:txBody>
+      </p:sp>
+      <p:sp>
+        <p:nvSpPr>
+          <p:cNvPr id="16" name="フッター プレースホルダー 15">
+            <a:extLst>
+              <a:ext uri="{FF2B5EF4-FFF2-40B4-BE49-F238E27FC236}">
+                <a16:creationId xmlns:a16="http://schemas.microsoft.com/office/drawing/2014/main" id="{A229CC71-18EF-40D4-E267-084DCBD6CA7D}"/>
+              </a:ext>
+            </a:extLst>
+          </p:cNvPr>
+          <p:cNvSpPr>
+            <a:spLocks noGrp="1"/>
+          </p:cNvSpPr>
+          <p:nvPr>
+            <p:ph type="ftr" sz="quarter" idx="3"/>
+          </p:nvPr>
+        </p:nvSpPr>
+        <p:spPr/>
+        <p:txBody>
+          <a:bodyPr/>
+          <a:lstStyle/>
+          <a:p>
+            <a:r>
+              <a:rPr lang="en-US" altLang="ja-JP"/>
+              <a:t>Copyright 2024 </a:t>
+            </a:r>
+            <a:r>
+              <a:rPr lang="ja-JP" altLang="en-US"/>
+              <a:t>アイデアクラフト </a:t>
+            </a:r>
+            <a:r>
+              <a:rPr lang="en-US" altLang="ja-JP"/>
+              <a:t>Kaimai Mizuhiro</a:t>
+            </a:r>
+            <a:endParaRPr lang="ja-JP" altLang="en-US"/>
+          </a:p>
+        </p:txBody>
+      </p:sp>
+    </p:spTree>
+    <p:extLst>
+      <p:ext uri="{BB962C8B-B14F-4D97-AF65-F5344CB8AC3E}">
+        <p14:creationId xmlns:p14="http://schemas.microsoft.com/office/powerpoint/2010/main" val="1190237363"/>
+      </p:ext>
+    </p:extLst>
+  </p:cSld>
+  <p:clrMapOvr>
+    <a:masterClrMapping/>
+  </p:clrMapOvr>
+</p:sld>
+</file>
+
+<file path=ppt/slides/slide13.xml><?xml version="1.0" encoding="utf-8"?>
+<p:sld xmlns:a="http://schemas.openxmlformats.org/drawingml/2006/main" xmlns:r="http://schemas.openxmlformats.org/officeDocument/2006/relationships" xmlns:p="http://schemas.openxmlformats.org/presentationml/2006/main">
+  <p:cSld>
+    <p:spTree>
+      <p:nvGrpSpPr>
+        <p:cNvPr id="1" name="">
+          <a:extLst>
+            <a:ext uri="{FF2B5EF4-FFF2-40B4-BE49-F238E27FC236}">
+              <a16:creationId xmlns:a16="http://schemas.microsoft.com/office/drawing/2014/main" id="{ADF5ACE4-868B-60B5-D085-D281078EFE2D}"/>
+            </a:ext>
+          </a:extLst>
+        </p:cNvPr>
+        <p:cNvGrpSpPr/>
+        <p:nvPr/>
+      </p:nvGrpSpPr>
+      <p:grpSpPr>
+        <a:xfrm>
+          <a:off x="0" y="0"/>
+          <a:ext cx="0" cy="0"/>
+          <a:chOff x="0" y="0"/>
+          <a:chExt cx="0" cy="0"/>
+        </a:xfrm>
+      </p:grpSpPr>
+      <p:sp>
+        <p:nvSpPr>
+          <p:cNvPr id="2" name="タイトル 1">
+            <a:extLst>
+              <a:ext uri="{FF2B5EF4-FFF2-40B4-BE49-F238E27FC236}">
+                <a16:creationId xmlns:a16="http://schemas.microsoft.com/office/drawing/2014/main" id="{C7437625-4529-C161-A702-FF8B3C89C8FE}"/>
+              </a:ext>
+            </a:extLst>
+          </p:cNvPr>
+          <p:cNvSpPr>
+            <a:spLocks noGrp="1"/>
+          </p:cNvSpPr>
+          <p:nvPr>
+            <p:ph type="title"/>
+          </p:nvPr>
+        </p:nvSpPr>
+        <p:spPr/>
+        <p:txBody>
+          <a:bodyPr/>
+          <a:lstStyle/>
+          <a:p>
+            <a:r>
+              <a:rPr lang="ja-JP" altLang="en-US" sz="2800">
+                <a:solidFill>
+                  <a:schemeClr val="tx1"/>
+                </a:solidFill>
+              </a:rPr>
+              <a:t>スライド削除</a:t>
+            </a:r>
+            <a:endParaRPr lang="ja-JP" altLang="en-US" sz="2800" dirty="0">
+              <a:solidFill>
+                <a:schemeClr val="tx1"/>
+              </a:solidFill>
+            </a:endParaRPr>
+          </a:p>
+        </p:txBody>
+      </p:sp>
+      <p:sp>
+        <p:nvSpPr>
+          <p:cNvPr id="12" name="テキスト ボックス 11">
+            <a:extLst>
+              <a:ext uri="{FF2B5EF4-FFF2-40B4-BE49-F238E27FC236}">
+                <a16:creationId xmlns:a16="http://schemas.microsoft.com/office/drawing/2014/main" id="{E852E163-7369-7A32-5EEF-B4B020773313}"/>
+              </a:ext>
+            </a:extLst>
+          </p:cNvPr>
+          <p:cNvSpPr txBox="1"/>
+          <p:nvPr/>
+        </p:nvSpPr>
+        <p:spPr bwMode="auto">
+          <a:xfrm>
+            <a:off x="1127453" y="1253698"/>
+            <a:ext cx="9577065" cy="400112"/>
+          </a:xfrm>
+          <a:prstGeom prst="rect">
+            <a:avLst/>
+          </a:prstGeom>
+          <a:noFill/>
+          <a:ln>
+            <a:noFill/>
+          </a:ln>
+          <a:extLst>
+            <a:ext uri="{909E8E84-426E-40DD-AFC4-6F175D3DCCD1}">
+              <a14:hiddenFill xmlns:a14="http://schemas.microsoft.com/office/drawing/2010/main">
+                <a:solidFill>
+                  <a:srgbClr val="FFFFFF"/>
+                </a:solidFill>
+              </a14:hiddenFill>
+            </a:ext>
+            <a:ext uri="{91240B29-F687-4F45-9708-019B960494DF}">
+              <a14:hiddenLine xmlns:a14="http://schemas.microsoft.com/office/drawing/2010/main" w="9525">
+                <a:solidFill>
+                  <a:srgbClr val="000000"/>
+                </a:solidFill>
+                <a:miter lim="800000"/>
+                <a:headEnd/>
+                <a:tailEnd/>
+              </a14:hiddenLine>
+            </a:ext>
+          </a:extLst>
+        </p:spPr>
+        <p:txBody>
+          <a:bodyPr vert="horz" wrap="square" lIns="91440" tIns="45721" rIns="91440" bIns="45721" numCol="1" rtlCol="0" anchor="t" anchorCtr="0" compatLnSpc="1">
+            <a:prstTxWarp prst="textNoShape">
+              <a:avLst/>
+            </a:prstTxWarp>
+            <a:spAutoFit/>
+          </a:bodyPr>
+          <a:lstStyle/>
+          <a:p>
+            <a:pPr eaLnBrk="1"/>
+            <a:r>
+              <a:rPr kumimoji="1" lang="en-US" altLang="ja-JP" sz="2000" kern="0">
+                <a:latin typeface="BIZ UDPゴシック" panose="020B0400000000000000" pitchFamily="50" charset="-128"/>
+                <a:ea typeface="BIZ UDPゴシック" panose="020B0400000000000000" pitchFamily="50" charset="-128"/>
+              </a:rPr>
+              <a:t>#CSL# </a:t>
+            </a:r>
+            <a:r>
+              <a:rPr kumimoji="1" lang="ja-JP" altLang="en-US" sz="2000" kern="0">
+                <a:latin typeface="BIZ UDPゴシック" panose="020B0400000000000000" pitchFamily="50" charset="-128"/>
+                <a:ea typeface="BIZ UDPゴシック" panose="020B0400000000000000" pitchFamily="50" charset="-128"/>
+              </a:rPr>
+              <a:t>削除対象スライド</a:t>
+            </a:r>
+            <a:endParaRPr kumimoji="1" lang="en-US" altLang="ja-JP" sz="2000" kern="0">
+              <a:latin typeface="BIZ UDPゴシック" panose="020B0400000000000000" pitchFamily="50" charset="-128"/>
+              <a:ea typeface="BIZ UDPゴシック" panose="020B0400000000000000" pitchFamily="50" charset="-128"/>
+            </a:endParaRPr>
+          </a:p>
+        </p:txBody>
+      </p:sp>
+      <p:sp>
+        <p:nvSpPr>
+          <p:cNvPr id="15" name="スライド番号プレースホルダー 14">
+            <a:extLst>
+              <a:ext uri="{FF2B5EF4-FFF2-40B4-BE49-F238E27FC236}">
+                <a16:creationId xmlns:a16="http://schemas.microsoft.com/office/drawing/2014/main" id="{5EBEC057-326E-D527-21B2-E59F1230F83B}"/>
+              </a:ext>
+            </a:extLst>
+          </p:cNvPr>
+          <p:cNvSpPr>
+            <a:spLocks noGrp="1"/>
+          </p:cNvSpPr>
+          <p:nvPr>
+            <p:ph type="sldNum" sz="quarter" idx="12"/>
+          </p:nvPr>
+        </p:nvSpPr>
+        <p:spPr/>
+        <p:txBody>
+          <a:bodyPr/>
+          <a:lstStyle/>
+          <a:p>
+            <a:fld id="{D2D8002D-B5B0-4BAC-B1F6-782DDCCE6D9C}" type="slidenum">
+              <a:rPr lang="ja-JP" altLang="en-US" smtClean="0"/>
+              <a:pPr/>
+              <a:t>12</a:t>
             </a:fld>
             <a:endParaRPr lang="ja-JP" altLang="en-US"/>
           </a:p>
